--- a/seminar-interviews/מצגת-פרויקט-גמר-ממוגרפיה.pptx
+++ b/seminar-interviews/מצגת-פרויקט-גמר-ממוגרפיה.pptx
@@ -2390,7 +2390,7 @@
       </p:grpSpPr>
       <p:pic>
         <p:nvPicPr>
-          <p:cNvPr id="2" name="Image 0" descr="/root/.claude/uploads/2ca03497-42eb-5d34-8079-069f09f39de3/e4536213-image.jpg">    </p:cNvPr>
+          <p:cNvPr id="2" name="Image 0" descr="/tmp/claude-0/-home-user-clickwriting-landing/2ca03497-42eb-5d34-8079-069f09f39de3/scratchpad/work/peres_logo.jpg">    </p:cNvPr>
           <p:cNvPicPr>
             <a:picLocks noChangeAspect="1"/>
           </p:cNvPicPr>
@@ -9300,7 +9300,7 @@
       </p:sp>
       <p:pic>
         <p:nvPicPr>
-          <p:cNvPr id="3" name="Image 0" descr="/root/.claude/uploads/2ca03497-42eb-5d34-8079-069f09f39de3/e4536213-image.jpg">    </p:cNvPr>
+          <p:cNvPr id="3" name="Image 0" descr="/tmp/claude-0/-home-user-clickwriting-landing/2ca03497-42eb-5d34-8079-069f09f39de3/scratchpad/work/peres_logo.jpg">    </p:cNvPr>
           <p:cNvPicPr>
             <a:picLocks noChangeAspect="1"/>
           </p:cNvPicPr>

--- a/seminar-interviews/מצגת-פרויקט-גמר-ממוגרפיה.pptx
+++ b/seminar-interviews/מצגת-פרויקט-גמר-ממוגרפיה.pptx
@@ -1927,7 +1927,7 @@
           <a:p>
             <a:r>
               <a:rPr lang="en-US" dirty="0"/>
-              <a:t>מפת הדרכים לארבעת השקפים הבאים. לומר במשפט אחד את השורה התחתונה שבתחתית התרשים: ההיענות היא מאזן כוחות ולא רמת ידע.</a:t>
+              <a:t>להסביר שהחסמים אינם פועלים במקביל אלא כל אחד בשלב אחר בדרך אל הבדיקה, ושהרצועה התחתונה היא מה שמעביר את האישה מתחנה לתחנה.</a:t>
             </a:r>
             <a:endParaRPr lang="en-US" dirty="0"/>
           </a:p>
@@ -19495,7 +19495,7 @@
                 <a:ea typeface="Arial" pitchFamily="34" charset="-122"/>
                 <a:cs typeface="Arial" pitchFamily="34" charset="-120"/>
               </a:rPr>
-              <a:t>ארבע התמות שעלו מן הניתוח</a:t>
+              <a:t>הדרך אל הבדיקה, והיכן פועלת כל תמה</a:t>
             </a:r>
             <a:endParaRPr lang="en-US" sz="3000" dirty="0"/>
           </a:p>
@@ -19503,7 +19503,7 @@
       </p:sp>
       <p:pic>
         <p:nvPicPr>
-          <p:cNvPr id="4" name="Image 0" descr="/tmp/claude-0/-home-user-clickwriting-landing/2ca03497-42eb-5d34-8079-069f09f39de3/scratchpad/work/themes.png">    </p:cNvPr>
+          <p:cNvPr id="4" name="Image 0" descr="/tmp/claude-0/-home-user-clickwriting-landing/2ca03497-42eb-5d34-8079-069f09f39de3/scratchpad/work/findings_path.png">    </p:cNvPr>
           <p:cNvPicPr>
             <a:picLocks noChangeAspect="1"/>
           </p:cNvPicPr>
@@ -19517,8 +19517,8 @@
         </p:blipFill>
         <p:spPr>
           <a:xfrm>
-            <a:off x="1874520" y="1225296"/>
-            <a:ext cx="8412480" cy="5185836"/>
+            <a:off x="640080" y="1481328"/>
+            <a:ext cx="10881360" cy="4479508"/>
           </a:xfrm>
           <a:prstGeom prst="rect">
             <a:avLst/>

--- a/seminar-interviews/מצגת-פרויקט-גמר-ממוגרפיה.pptx
+++ b/seminar-interviews/מצגת-פרויקט-גמר-ממוגרפיה.pptx
@@ -783,7 +783,7 @@
           <a:p>
             <a:r>
               <a:rPr lang="en-US" dirty="0"/>
-              <a:t>זו התמה היחידה שכולה מאיצים, וממנה נגזרות רוב ההמלצות. הניגוד בין מראם ללילה הוא הלב של השקף.</a:t>
+              <a:t>זו התמה היחידה שכולה מאיצים, וממנה נגזרות רוב ההמלצות. הניגוד בין איבתיסאם ללילה הוא הלב של השקף.</a:t>
             </a:r>
             <a:endParaRPr lang="en-US" dirty="0"/>
           </a:p>
@@ -1399,7 +1399,7 @@
           <a:p>
             <a:r>
               <a:rPr lang="en-US" dirty="0"/>
-              <a:t>להציג את סדר הדברים ואת חלוקת הזמן בין שלוש המציגות. כחצי דקה.</a:t>
+              <a:t>להציג את סדר הדברים ואת חלוקת הזמן בין ארבע המציגות. כחצי דקה.</a:t>
             </a:r>
             <a:endParaRPr lang="en-US" dirty="0"/>
           </a:p>
@@ -2688,8 +2688,8 @@
         </p:nvSpPr>
         <p:spPr>
           <a:xfrm>
-            <a:off x="3017520" y="4718304"/>
-            <a:ext cx="6126480" cy="292608"/>
+            <a:off x="2011680" y="4718304"/>
+            <a:ext cx="8138160" cy="292608"/>
           </a:xfrm>
           <a:prstGeom prst="rect">
             <a:avLst/>
@@ -2705,7 +2705,7 @@
               <a:buNone/>
             </a:pPr>
             <a:r>
-              <a:rPr lang="en-US" sz="1300" b="1" dirty="0">
+              <a:rPr lang="en-US" sz="1250" b="1" dirty="0">
                 <a:solidFill>
                   <a:srgbClr val="16202B"/>
                 </a:solidFill>
@@ -2713,9 +2713,9 @@
                 <a:ea typeface="Arial" pitchFamily="34" charset="-122"/>
                 <a:cs typeface="Arial" pitchFamily="34" charset="-120"/>
               </a:rPr>
-              <a:t>מגישות:  [שם מלא]  |  [שם מלא]  |  [שם מלא]</a:t>
-            </a:r>
-            <a:endParaRPr lang="en-US" sz="1300" dirty="0"/>
+              <a:t>מגישות: מראם זיד  |  טגאיה סמאנך  |  עאליה אבו עראר  |  לילה נגילי</a:t>
+            </a:r>
+            <a:endParaRPr lang="en-US" sz="1250" dirty="0"/>
           </a:p>
         </p:txBody>
       </p:sp>
@@ -2752,7 +2752,7 @@
                 <a:ea typeface="Arial" pitchFamily="34" charset="-122"/>
                 <a:cs typeface="Arial" pitchFamily="34" charset="-120"/>
               </a:rPr>
-              <a:t>בהנחיית: ד"ר שנהב פרץ</a:t>
+              <a:t>בהנחיית: ד"ר אסנת בשקין</a:t>
             </a:r>
             <a:endParaRPr lang="en-US" sz="1300" dirty="0"/>
           </a:p>
@@ -3554,7 +3554,7 @@
                 <a:ea typeface="Arial" pitchFamily="34" charset="-122"/>
                 <a:cs typeface="Arial" pitchFamily="34" charset="-120"/>
               </a:rPr>
-              <a:t>עאליה אבו עראר, בת 47, ערערה בנגב  |  מצטטת אישה מן התור לניידת</a:t>
+              <a:t>חנאן אבו סביח, בת 47, ערערה בנגב  |  מצטטת אישה מן התור לניידת</a:t>
             </a:r>
             <a:endParaRPr lang="en-US" sz="1150" dirty="0"/>
           </a:p>
@@ -4317,7 +4317,7 @@
                 <a:ea typeface="Arial" pitchFamily="34" charset="-122"/>
                 <a:cs typeface="Arial" pitchFamily="34" charset="-120"/>
               </a:rPr>
-              <a:t>טגאיה סמאנך, בת 58, חולון  |  עובדת ניקיון בשכר יומי</a:t>
+              <a:t>ברכנש אלמו, בת 58, חולון  |  עובדת ניקיון בשכר יומי</a:t>
             </a:r>
             <a:endParaRPr lang="en-US" sz="1150" dirty="0"/>
           </a:p>
@@ -5080,7 +5080,7 @@
                 <a:ea typeface="Arial" pitchFamily="34" charset="-122"/>
                 <a:cs typeface="Arial" pitchFamily="34" charset="-120"/>
               </a:rPr>
-              <a:t>לילה נגילי, בת 54, רמלה  |  לא נבדקה מאז</a:t>
+              <a:t>ופאא דכוור, בת 54, רמלה  |  לא נבדקה מאז</a:t>
             </a:r>
             <a:endParaRPr lang="en-US" sz="1150" dirty="0"/>
           </a:p>
@@ -9495,7 +9495,7 @@
                 <a:ea typeface="Arial" pitchFamily="34" charset="-122"/>
                 <a:cs typeface="Arial" pitchFamily="34" charset="-120"/>
               </a:rPr>
-              <a:t>המרכז האקדמי פרס  |  החוג למנהל מערכות בריאות  |  בהנחיית ד"ר שנהב פרץ  |  תשפ"ו</a:t>
+              <a:t>המרכז האקדמי פרס  |  החוג למנהל מערכות בריאות  |  בהנחיית ד"ר אסנת בשקין  |  תשפ"ו</a:t>
             </a:r>
             <a:endParaRPr lang="en-US" sz="1150" dirty="0"/>
           </a:p>
@@ -10752,7 +10752,7 @@
                 <a:ea typeface="Arial" pitchFamily="34" charset="-122"/>
                 <a:cs typeface="Arial" pitchFamily="34" charset="-120"/>
               </a:rPr>
-              <a:t>חלוקת ההצגה: מציגה א׳ פרקים 1 עד 2  |  מציגה ב׳ פרקים 3 עד 4  |  מציגה ג׳ פרקים 5 עד 6  |  משך כולל: 15 דקות</a:t>
+              <a:t>חלוקת ההצגה: מציגה א׳ פרקים 1 עד 2  |  מציגה ב׳ פרק 3  |  מציגה ג׳ פרק 4  |  מציגה ד׳ פרקים 5 עד 6  |  משך כולל: 15 דקות</a:t>
             </a:r>
             <a:endParaRPr lang="en-US" sz="1300" dirty="0"/>
           </a:p>
@@ -13792,7 +13792,7 @@
                 <a:ea typeface="Arial" pitchFamily="34" charset="-122"/>
                 <a:cs typeface="Arial" pitchFamily="34" charset="-120"/>
               </a:rPr>
-              <a:t>שישה ראיונות בעברית, חמישה בערבית ואחד באמהרית. כל אחת משלוש חברות הצוות ערכה ארבעה ראיונות.</a:t>
+              <a:t>שישה ראיונות בעברית, חמישה בערבית ואחד באמהרית. כל אחת מארבע חברות הצוות ערכה שלושה ראיונות.</a:t>
             </a:r>
             <a:endParaRPr lang="en-US" sz="1250" dirty="0"/>
           </a:p>
@@ -14718,7 +14718,7 @@
                           <a:ea typeface="Arial" pitchFamily="34" charset="-122"/>
                           <a:cs typeface="Arial" pitchFamily="34" charset="-120"/>
                         </a:rPr>
-                        <a:t>לילה נגילי</a:t>
+                        <a:t>ופאא דכוור</a:t>
                       </a:r>
                       <a:endParaRPr lang="en-US" sz="960" dirty="0">
                         <a:latin typeface="Arial" charset="0"/>
@@ -15128,7 +15128,7 @@
                           <a:ea typeface="Arial" pitchFamily="34" charset="-122"/>
                           <a:cs typeface="Arial" pitchFamily="34" charset="-120"/>
                         </a:rPr>
-                        <a:t>טגאיה סמאנך</a:t>
+                        <a:t>ברכנש אלמו</a:t>
                       </a:r>
                       <a:endParaRPr lang="en-US" sz="960" dirty="0">
                         <a:latin typeface="Arial" charset="0"/>
@@ -15538,7 +15538,7 @@
                           <a:ea typeface="Arial" pitchFamily="34" charset="-122"/>
                           <a:cs typeface="Arial" pitchFamily="34" charset="-120"/>
                         </a:rPr>
-                        <a:t>עאליה אבו עראר</a:t>
+                        <a:t>חנאן אבו סביח</a:t>
                       </a:r>
                       <a:endParaRPr lang="en-US" sz="960" dirty="0">
                         <a:latin typeface="Arial" charset="0"/>
@@ -15948,7 +15948,7 @@
                           <a:ea typeface="Arial" pitchFamily="34" charset="-122"/>
                           <a:cs typeface="Arial" pitchFamily="34" charset="-120"/>
                         </a:rPr>
-                        <a:t>מראם ח'טיב</a:t>
+                        <a:t>איבתיסאם דאהר</a:t>
                       </a:r>
                       <a:endParaRPr lang="en-US" sz="960" dirty="0">
                         <a:latin typeface="Arial" charset="0"/>
@@ -19518,7 +19518,7 @@
         <p:spPr>
           <a:xfrm>
             <a:off x="640080" y="1481328"/>
-            <a:ext cx="10881360" cy="4479508"/>
+            <a:ext cx="10881360" cy="4334922"/>
           </a:xfrm>
           <a:prstGeom prst="rect">
             <a:avLst/>
@@ -20282,7 +20282,7 @@
                 <a:ea typeface="Arial" pitchFamily="34" charset="-122"/>
                 <a:cs typeface="Arial" pitchFamily="34" charset="-120"/>
               </a:rPr>
-              <a:t>מראם ח'טיב, בת 52, רמלה  |  נבדקה לראשונה בגיל 51</a:t>
+              <a:t>איבתיסאם דאהר, בת 52, רמלה  |  נבדקה לראשונה בגיל 51</a:t>
             </a:r>
             <a:endParaRPr lang="en-US" sz="1150" dirty="0"/>
           </a:p>

--- a/seminar-interviews/מצגת-פרויקט-גמר-ממוגרפיה.pptx
+++ b/seminar-interviews/מצגת-פרויקט-גמר-ממוגרפיה.pptx
@@ -8823,7 +8823,7 @@
                 <a:ea typeface="Arial" pitchFamily="34" charset="-122"/>
                 <a:cs typeface="Arial" pitchFamily="34" charset="-120"/>
               </a:rPr>
-              <a:t>1</a:t>
+              <a:t>4</a:t>
             </a:r>
             <a:endParaRPr lang="en-US" sz="1500" dirty="0"/>
           </a:p>
@@ -8968,7 +8968,7 @@
                 <a:ea typeface="Arial" pitchFamily="34" charset="-122"/>
                 <a:cs typeface="Arial" pitchFamily="34" charset="-120"/>
               </a:rPr>
-              <a:t>2</a:t>
+              <a:t>5</a:t>
             </a:r>
             <a:endParaRPr lang="en-US" sz="1500" dirty="0"/>
           </a:p>
@@ -9113,7 +9113,7 @@
                 <a:ea typeface="Arial" pitchFamily="34" charset="-122"/>
                 <a:cs typeface="Arial" pitchFamily="34" charset="-120"/>
               </a:rPr>
-              <a:t>3</a:t>
+              <a:t>6</a:t>
             </a:r>
             <a:endParaRPr lang="en-US" sz="1500" dirty="0"/>
           </a:p>
